--- a/resources/office-templates/epidemic-report-template.pptx
+++ b/resources/office-templates/epidemic-report-template.pptx
@@ -3442,7 +3442,7 @@
                   <a:srgbClr val="FFFFFF"/>
                 </a:solidFill>
               </a:rPr>
-              <a:t>三波疫情同期比較</a:t>
+              <a:t>今年 vs 去年同期(含歷史範圍)</a:t>
             </a:r>
           </a:p>
           <a:p>
@@ -3452,7 +3452,7 @@
                   <a:srgbClr val="E8EEE7"/>
                 </a:solidFill>
               </a:rPr>
-              <a:t>Pattern B:類別配色,折線使用加深版確保 WCAG AA</a:t>
+              <a:t>Pattern A:主色焦點 + 中性灰歷史範圍帶</a:t>
             </a:r>
           </a:p>
         </p:txBody>
@@ -3509,7 +3509,7 @@
                   <a:srgbClr val="444C43"/>
                 </a:solidFill>
               </a:rPr>
-              <a:t>以相對天數對齊不同波次起點。3 條折線使用 LINE_COLORS 加深版色彩。</a:t>
+              <a:t>今年用主色 #5D7F58 作為焦點,去年同期用中性灰虛線,歷史範圍(±1 SD)用灰色填充帶,讀者能立即看出當前是否偏離常態。</a:t>
             </a:r>
           </a:p>
         </p:txBody>

--- a/resources/office-templates/epidemic-report-template.pptx
+++ b/resources/office-templates/epidemic-report-template.pptx
@@ -3290,7 +3290,7 @@
                   <a:srgbClr val="E8EEE7"/>
                 </a:solidFill>
               </a:rPr>
-              <a:t>Pattern A:主色直條 + 7 日中心對齊移動平均</a:t>
+              <a:t>Pattern A:主色直條 + 7 日 trailing 移動平均</a:t>
             </a:r>
           </a:p>
         </p:txBody>
@@ -3347,7 +3347,7 @@
                   <a:srgbClr val="444C43"/>
                 </a:solidFill>
               </a:rPr>
-              <a:t>每日填報受週末效應影響,以 7 日中心對齊均線呈現潛在趨勢。Y 軸從零開始。</a:t>
+              <a:t>每日填報受週末效應影響,以 7 日 trailing 均線(本日含前 6 日)呈現潛在趨勢。Y 軸從零開始。</a:t>
             </a:r>
           </a:p>
         </p:txBody>
@@ -4654,7 +4654,7 @@
                   <a:srgbClr val="444C43"/>
                 </a:solidFill>
               </a:rPr>
-              <a:t>• 7 日移動平均使用「中心對齊」(非 trailing)</a:t>
+              <a:t>• 7 日移動平均使用 trailing(本日含前 6 日)</a:t>
             </a:r>
           </a:p>
           <a:p>

--- a/resources/office-templates/epidemic-report-template.pptx
+++ b/resources/office-templates/epidemic-report-template.pptx
@@ -3311,8 +3311,8 @@
         </p:blipFill>
         <p:spPr>
           <a:xfrm>
-            <a:off x="1744050" y="1005840"/>
-            <a:ext cx="8703595" cy="4754880"/>
+            <a:off x="1690259" y="1005840"/>
+            <a:ext cx="8811176" cy="4754880"/>
           </a:xfrm>
           <a:prstGeom prst="rect">
             <a:avLst/>
@@ -3473,8 +3473,8 @@
         </p:blipFill>
         <p:spPr>
           <a:xfrm>
-            <a:off x="1928209" y="1005840"/>
-            <a:ext cx="8335276" cy="4754880"/>
+            <a:off x="1870879" y="1005840"/>
+            <a:ext cx="8449937" cy="4754880"/>
           </a:xfrm>
           <a:prstGeom prst="rect">
             <a:avLst/>
@@ -3635,8 +3635,8 @@
         </p:blipFill>
         <p:spPr>
           <a:xfrm>
-            <a:off x="1702995" y="1005840"/>
-            <a:ext cx="8785704" cy="4754880"/>
+            <a:off x="1648945" y="1005840"/>
+            <a:ext cx="8893804" cy="4754880"/>
           </a:xfrm>
           <a:prstGeom prst="rect">
             <a:avLst/>
@@ -3797,8 +3797,8 @@
         </p:blipFill>
         <p:spPr>
           <a:xfrm>
-            <a:off x="1994852" y="1005840"/>
-            <a:ext cx="8201990" cy="4754880"/>
+            <a:off x="1946069" y="1005840"/>
+            <a:ext cx="8299557" cy="4754880"/>
           </a:xfrm>
           <a:prstGeom prst="rect">
             <a:avLst/>

--- a/resources/office-templates/epidemic-report-template.pptx
+++ b/resources/office-templates/epidemic-report-template.pptx
@@ -3311,8 +3311,8 @@
         </p:blipFill>
         <p:spPr>
           <a:xfrm>
-            <a:off x="1690259" y="1005840"/>
-            <a:ext cx="8811176" cy="4754880"/>
+            <a:off x="1737831" y="1005840"/>
+            <a:ext cx="8716032" cy="4754880"/>
           </a:xfrm>
           <a:prstGeom prst="rect">
             <a:avLst/>
@@ -3473,8 +3473,8 @@
         </p:blipFill>
         <p:spPr>
           <a:xfrm>
-            <a:off x="1870879" y="1005840"/>
-            <a:ext cx="8449937" cy="4754880"/>
+            <a:off x="1919263" y="1005840"/>
+            <a:ext cx="8353168" cy="4754880"/>
           </a:xfrm>
           <a:prstGeom prst="rect">
             <a:avLst/>
@@ -3635,8 +3635,8 @@
         </p:blipFill>
         <p:spPr>
           <a:xfrm>
-            <a:off x="1648945" y="1005840"/>
-            <a:ext cx="8893804" cy="4754880"/>
+            <a:off x="1703564" y="1005840"/>
+            <a:ext cx="8784566" cy="4754880"/>
           </a:xfrm>
           <a:prstGeom prst="rect">
             <a:avLst/>
@@ -3797,8 +3797,8 @@
         </p:blipFill>
         <p:spPr>
           <a:xfrm>
-            <a:off x="1946069" y="1005840"/>
-            <a:ext cx="8299557" cy="4754880"/>
+            <a:off x="1973760" y="1005840"/>
+            <a:ext cx="8244175" cy="4754880"/>
           </a:xfrm>
           <a:prstGeom prst="rect">
             <a:avLst/>

--- a/resources/office-templates/epidemic-report-template.pptx
+++ b/resources/office-templates/epidemic-report-template.pptx
@@ -4634,7 +4634,7 @@
                   <a:srgbClr val="444C43"/>
                 </a:solidFill>
               </a:rPr>
-              <a:t>• Y 軸從零開始,不截斷座標</a:t>
+              <a:t>• 直條圖 Y 軸從零開始,不截斷座標(折線視情境)</a:t>
             </a:r>
           </a:p>
           <a:p>
